--- a/docs/找丫找-商业需求文档-v2.1.pptx
+++ b/docs/找丫找-商业需求文档-v2.1.pptx
@@ -5815,7 +5815,7 @@
                   </a:schemeClr>
                 </a:solidFill>
               </a:rPr>
-              <a:t>找鸭找 APP</a:t>
+              <a:t>找丫找 APP</a:t>
             </a:r>
             <a:endParaRPr lang="zh-CN" altLang="en-US" dirty="0"/>
           </a:p>
@@ -31136,7 +31136,7 @@
             <a:pPr lvl="0"/>
             <a:r>
               <a:rPr lang="en-US"/>
-              <a:t>找鸭找 APP · BRD v2.1 评审版</a:t>
+              <a:t>找丫找 APP · BRD v2.1 评审版</a:t>
             </a:r>
           </a:p>
         </p:txBody>
